--- a/Hosanna (Praise is Rising).pptx
+++ b/Hosanna (Praise is Rising).pptx
@@ -11,16 +11,20 @@
     <p:sldId id="281" r:id="rId5"/>
     <p:sldId id="290" r:id="rId6"/>
     <p:sldId id="279" r:id="rId7"/>
-    <p:sldId id="282" r:id="rId8"/>
-    <p:sldId id="291" r:id="rId9"/>
-    <p:sldId id="292" r:id="rId10"/>
-    <p:sldId id="293" r:id="rId11"/>
-    <p:sldId id="294" r:id="rId12"/>
-    <p:sldId id="285" r:id="rId13"/>
-    <p:sldId id="295" r:id="rId14"/>
-    <p:sldId id="296" r:id="rId15"/>
-    <p:sldId id="297" r:id="rId16"/>
-    <p:sldId id="298" r:id="rId17"/>
+    <p:sldId id="299" r:id="rId8"/>
+    <p:sldId id="282" r:id="rId9"/>
+    <p:sldId id="291" r:id="rId10"/>
+    <p:sldId id="292" r:id="rId11"/>
+    <p:sldId id="293" r:id="rId12"/>
+    <p:sldId id="294" r:id="rId13"/>
+    <p:sldId id="285" r:id="rId14"/>
+    <p:sldId id="295" r:id="rId15"/>
+    <p:sldId id="296" r:id="rId16"/>
+    <p:sldId id="300" r:id="rId17"/>
+    <p:sldId id="301" r:id="rId18"/>
+    <p:sldId id="297" r:id="rId19"/>
+    <p:sldId id="298" r:id="rId20"/>
+    <p:sldId id="302" r:id="rId21"/>
   </p:sldIdLst>
   <p:sldSz cx="9144000" cy="6858000" type="screen4x3"/>
   <p:notesSz cx="6858000" cy="9144000"/>
@@ -258,7 +262,7 @@
           <a:p>
             <a:fld id="{E759A0DE-F190-5444-87AC-4719D5F20D15}" type="datetimeFigureOut">
               <a:rPr lang="en-US" smtClean="0"/>
-              <a:t>7/14/26</a:t>
+              <a:t>10/28/26</a:t>
             </a:fld>
             <a:endParaRPr lang="en-US"/>
           </a:p>
@@ -428,7 +432,7 @@
           <a:p>
             <a:fld id="{E759A0DE-F190-5444-87AC-4719D5F20D15}" type="datetimeFigureOut">
               <a:rPr lang="en-US" smtClean="0"/>
-              <a:t>7/14/26</a:t>
+              <a:t>10/28/26</a:t>
             </a:fld>
             <a:endParaRPr lang="en-US"/>
           </a:p>
@@ -608,7 +612,7 @@
           <a:p>
             <a:fld id="{E759A0DE-F190-5444-87AC-4719D5F20D15}" type="datetimeFigureOut">
               <a:rPr lang="en-US" smtClean="0"/>
-              <a:t>7/14/26</a:t>
+              <a:t>10/28/26</a:t>
             </a:fld>
             <a:endParaRPr lang="en-US"/>
           </a:p>
@@ -778,7 +782,7 @@
           <a:p>
             <a:fld id="{E759A0DE-F190-5444-87AC-4719D5F20D15}" type="datetimeFigureOut">
               <a:rPr lang="en-US" smtClean="0"/>
-              <a:t>7/14/26</a:t>
+              <a:t>10/28/26</a:t>
             </a:fld>
             <a:endParaRPr lang="en-US"/>
           </a:p>
@@ -1024,7 +1028,7 @@
           <a:p>
             <a:fld id="{E759A0DE-F190-5444-87AC-4719D5F20D15}" type="datetimeFigureOut">
               <a:rPr lang="en-US" smtClean="0"/>
-              <a:t>7/14/26</a:t>
+              <a:t>10/28/26</a:t>
             </a:fld>
             <a:endParaRPr lang="en-US"/>
           </a:p>
@@ -1256,7 +1260,7 @@
           <a:p>
             <a:fld id="{E759A0DE-F190-5444-87AC-4719D5F20D15}" type="datetimeFigureOut">
               <a:rPr lang="en-US" smtClean="0"/>
-              <a:t>7/14/26</a:t>
+              <a:t>10/28/26</a:t>
             </a:fld>
             <a:endParaRPr lang="en-US"/>
           </a:p>
@@ -1623,7 +1627,7 @@
           <a:p>
             <a:fld id="{E759A0DE-F190-5444-87AC-4719D5F20D15}" type="datetimeFigureOut">
               <a:rPr lang="en-US" smtClean="0"/>
-              <a:t>7/14/26</a:t>
+              <a:t>10/28/26</a:t>
             </a:fld>
             <a:endParaRPr lang="en-US"/>
           </a:p>
@@ -1741,7 +1745,7 @@
           <a:p>
             <a:fld id="{E759A0DE-F190-5444-87AC-4719D5F20D15}" type="datetimeFigureOut">
               <a:rPr lang="en-US" smtClean="0"/>
-              <a:t>7/14/26</a:t>
+              <a:t>10/28/26</a:t>
             </a:fld>
             <a:endParaRPr lang="en-US"/>
           </a:p>
@@ -1836,7 +1840,7 @@
           <a:p>
             <a:fld id="{E759A0DE-F190-5444-87AC-4719D5F20D15}" type="datetimeFigureOut">
               <a:rPr lang="en-US" smtClean="0"/>
-              <a:t>7/14/26</a:t>
+              <a:t>10/28/26</a:t>
             </a:fld>
             <a:endParaRPr lang="en-US"/>
           </a:p>
@@ -2113,7 +2117,7 @@
           <a:p>
             <a:fld id="{E759A0DE-F190-5444-87AC-4719D5F20D15}" type="datetimeFigureOut">
               <a:rPr lang="en-US" smtClean="0"/>
-              <a:t>7/14/26</a:t>
+              <a:t>10/28/26</a:t>
             </a:fld>
             <a:endParaRPr lang="en-US"/>
           </a:p>
@@ -2370,7 +2374,7 @@
           <a:p>
             <a:fld id="{E759A0DE-F190-5444-87AC-4719D5F20D15}" type="datetimeFigureOut">
               <a:rPr lang="en-US" smtClean="0"/>
-              <a:t>7/14/26</a:t>
+              <a:t>10/28/26</a:t>
             </a:fld>
             <a:endParaRPr lang="en-US"/>
           </a:p>
@@ -2583,7 +2587,7 @@
           <a:p>
             <a:fld id="{E759A0DE-F190-5444-87AC-4719D5F20D15}" type="datetimeFigureOut">
               <a:rPr lang="en-US" smtClean="0"/>
-              <a:t>7/14/26</a:t>
+              <a:t>10/28/26</a:t>
             </a:fld>
             <a:endParaRPr lang="en-US"/>
           </a:p>
@@ -3175,6 +3179,152 @@
         <p:cNvPr id="1" name="">
           <a:extLst>
             <a:ext uri="{FF2B5EF4-FFF2-40B4-BE49-F238E27FC236}">
+              <a16:creationId xmlns:a16="http://schemas.microsoft.com/office/drawing/2014/main" id="{1ACE3B7E-6A4C-4B3D-3B04-373AC3904386}"/>
+            </a:ext>
+          </a:extLst>
+        </p:cNvPr>
+        <p:cNvGrpSpPr/>
+        <p:nvPr/>
+      </p:nvGrpSpPr>
+      <p:grpSpPr>
+        <a:xfrm>
+          <a:off x="0" y="0"/>
+          <a:ext cx="0" cy="0"/>
+          <a:chOff x="0" y="0"/>
+          <a:chExt cx="0" cy="0"/>
+        </a:xfrm>
+      </p:grpSpPr>
+      <p:sp>
+        <p:nvSpPr>
+          <p:cNvPr id="3" name="Subtitle 2">
+            <a:extLst>
+              <a:ext uri="{FF2B5EF4-FFF2-40B4-BE49-F238E27FC236}">
+                <a16:creationId xmlns:a16="http://schemas.microsoft.com/office/drawing/2014/main" id="{7070656A-99E5-DC2B-B1AA-76D635E1E90F}"/>
+              </a:ext>
+            </a:extLst>
+          </p:cNvPr>
+          <p:cNvSpPr>
+            <a:spLocks noGrp="1"/>
+          </p:cNvSpPr>
+          <p:nvPr>
+            <p:ph type="subTitle" idx="1"/>
+          </p:nvPr>
+        </p:nvSpPr>
+        <p:spPr>
+          <a:xfrm>
+            <a:off x="84221" y="213360"/>
+            <a:ext cx="8891337" cy="6416040"/>
+          </a:xfrm>
+        </p:spPr>
+        <p:txBody>
+          <a:bodyPr>
+            <a:noAutofit/>
+          </a:bodyPr>
+          <a:lstStyle/>
+          <a:p>
+            <a:endParaRPr lang="en-US" sz="5400" b="1" dirty="0">
+              <a:solidFill>
+                <a:schemeClr val="bg1"/>
+              </a:solidFill>
+              <a:latin typeface="Avenir Medium" panose="02000503020000020003" pitchFamily="2" charset="0"/>
+              <a:ea typeface="Bodoni Ornaments" pitchFamily="2" charset="0"/>
+            </a:endParaRPr>
+          </a:p>
+          <a:p>
+            <a:r>
+              <a:rPr lang="en-US" sz="5400" b="1" dirty="0" err="1">
+                <a:solidFill>
+                  <a:schemeClr val="bg1"/>
+                </a:solidFill>
+                <a:latin typeface="Avenir Medium" panose="02000503020000020003" pitchFamily="2" charset="0"/>
+                <a:ea typeface="Bodoni Ornaments" pitchFamily="2" charset="0"/>
+              </a:rPr>
+              <a:t>'Cause</a:t>
+            </a:r>
+            <a:r>
+              <a:rPr lang="en-US" sz="5400" b="1" dirty="0">
+                <a:solidFill>
+                  <a:schemeClr val="bg1"/>
+                </a:solidFill>
+                <a:latin typeface="Avenir Medium" panose="02000503020000020003" pitchFamily="2" charset="0"/>
+                <a:ea typeface="Bodoni Ornaments" pitchFamily="2" charset="0"/>
+              </a:rPr>
+              <a:t> when we see You</a:t>
+            </a:r>
+          </a:p>
+          <a:p>
+            <a:r>
+              <a:rPr lang="en-US" sz="5400" b="1" dirty="0">
+                <a:solidFill>
+                  <a:schemeClr val="bg1"/>
+                </a:solidFill>
+                <a:latin typeface="Avenir Medium" panose="02000503020000020003" pitchFamily="2" charset="0"/>
+                <a:ea typeface="Bodoni Ornaments" pitchFamily="2" charset="0"/>
+              </a:rPr>
+              <a:t>We find strength </a:t>
+            </a:r>
+          </a:p>
+          <a:p>
+            <a:r>
+              <a:rPr lang="en-US" sz="5400" b="1" dirty="0">
+                <a:solidFill>
+                  <a:schemeClr val="bg1"/>
+                </a:solidFill>
+                <a:latin typeface="Avenir Medium" panose="02000503020000020003" pitchFamily="2" charset="0"/>
+                <a:ea typeface="Bodoni Ornaments" pitchFamily="2" charset="0"/>
+              </a:rPr>
+              <a:t>to face the day</a:t>
+            </a:r>
+          </a:p>
+          <a:p>
+            <a:endParaRPr lang="en-US" sz="5400" b="1" dirty="0">
+              <a:solidFill>
+                <a:schemeClr val="bg1"/>
+              </a:solidFill>
+              <a:latin typeface="Avenir Medium" panose="02000503020000020003" pitchFamily="2" charset="0"/>
+              <a:ea typeface="Bodoni Ornaments" pitchFamily="2" charset="0"/>
+            </a:endParaRPr>
+          </a:p>
+          <a:p>
+            <a:endParaRPr lang="en-US" sz="5400" b="1" dirty="0">
+              <a:solidFill>
+                <a:schemeClr val="bg1"/>
+              </a:solidFill>
+              <a:latin typeface="Avenir Medium" panose="02000503020000020003" pitchFamily="2" charset="0"/>
+              <a:ea typeface="Bodoni Ornaments" pitchFamily="2" charset="0"/>
+            </a:endParaRPr>
+          </a:p>
+        </p:txBody>
+      </p:sp>
+    </p:spTree>
+    <p:extLst>
+      <p:ext uri="{BB962C8B-B14F-4D97-AF65-F5344CB8AC3E}">
+        <p14:creationId xmlns:p14="http://schemas.microsoft.com/office/powerpoint/2010/main" val="2309639426"/>
+      </p:ext>
+    </p:extLst>
+  </p:cSld>
+  <p:clrMapOvr>
+    <a:masterClrMapping/>
+  </p:clrMapOvr>
+</p:sld>
+</file>
+
+<file path=ppt/slides/slide11.xml><?xml version="1.0" encoding="utf-8"?>
+<p:sld xmlns:a="http://schemas.openxmlformats.org/drawingml/2006/main" xmlns:r="http://schemas.openxmlformats.org/officeDocument/2006/relationships" xmlns:p="http://schemas.openxmlformats.org/presentationml/2006/main">
+  <p:cSld>
+    <p:bg>
+      <p:bgPr>
+        <a:solidFill>
+          <a:schemeClr val="tx1"/>
+        </a:solidFill>
+        <a:effectLst/>
+      </p:bgPr>
+    </p:bg>
+    <p:spTree>
+      <p:nvGrpSpPr>
+        <p:cNvPr id="1" name="">
+          <a:extLst>
+            <a:ext uri="{FF2B5EF4-FFF2-40B4-BE49-F238E27FC236}">
               <a16:creationId xmlns:a16="http://schemas.microsoft.com/office/drawing/2014/main" id="{B0B41B99-0DDC-4E64-A558-C52BDD5A3295}"/>
             </a:ext>
           </a:extLst>
@@ -3295,7 +3445,7 @@
 </p:sld>
 </file>
 
-<file path=ppt/slides/slide11.xml><?xml version="1.0" encoding="utf-8"?>
+<file path=ppt/slides/slide12.xml><?xml version="1.0" encoding="utf-8"?>
 <p:sld xmlns:a="http://schemas.openxmlformats.org/drawingml/2006/main" xmlns:r="http://schemas.openxmlformats.org/officeDocument/2006/relationships" xmlns:p="http://schemas.openxmlformats.org/presentationml/2006/main">
   <p:cSld>
     <p:bg>
@@ -3399,6 +3549,15 @@
             </a:r>
           </a:p>
           <a:p>
+            <a:endParaRPr lang="en-US" sz="5400" b="1" dirty="0">
+              <a:solidFill>
+                <a:schemeClr val="bg1"/>
+              </a:solidFill>
+              <a:latin typeface="Avenir Medium" panose="02000503020000020003" pitchFamily="2" charset="0"/>
+              <a:ea typeface="Bodoni Ornaments" pitchFamily="2" charset="0"/>
+            </a:endParaRPr>
+          </a:p>
+          <a:p>
             <a:r>
               <a:rPr lang="en-US" sz="5400" b="1" dirty="0">
                 <a:solidFill>
@@ -3434,7 +3593,7 @@
 </p:sld>
 </file>
 
-<file path=ppt/slides/slide12.xml><?xml version="1.0" encoding="utf-8"?>
+<file path=ppt/slides/slide13.xml><?xml version="1.0" encoding="utf-8"?>
 <p:sld xmlns:a="http://schemas.openxmlformats.org/drawingml/2006/main" xmlns:r="http://schemas.openxmlformats.org/officeDocument/2006/relationships" xmlns:p="http://schemas.openxmlformats.org/presentationml/2006/main">
   <p:cSld>
     <p:bg>
@@ -3538,6 +3697,15 @@
             </a:r>
           </a:p>
           <a:p>
+            <a:endParaRPr lang="en-US" sz="5400" b="1" dirty="0">
+              <a:solidFill>
+                <a:schemeClr val="bg1"/>
+              </a:solidFill>
+              <a:latin typeface="Avenir Medium" panose="02000503020000020003" pitchFamily="2" charset="0"/>
+              <a:ea typeface="Bodoni Ornaments" pitchFamily="2" charset="0"/>
+            </a:endParaRPr>
+          </a:p>
+          <a:p>
             <a:r>
               <a:rPr lang="en-US" sz="5400" b="1" dirty="0">
                 <a:solidFill>
@@ -3585,7 +3753,7 @@
 </p:sld>
 </file>
 
-<file path=ppt/slides/slide13.xml><?xml version="1.0" encoding="utf-8"?>
+<file path=ppt/slides/slide14.xml><?xml version="1.0" encoding="utf-8"?>
 <p:sld xmlns:a="http://schemas.openxmlformats.org/drawingml/2006/main" xmlns:r="http://schemas.openxmlformats.org/officeDocument/2006/relationships" xmlns:p="http://schemas.openxmlformats.org/presentationml/2006/main">
   <p:cSld>
     <p:bg>
@@ -3731,7 +3899,7 @@
 </p:sld>
 </file>
 
-<file path=ppt/slides/slide14.xml><?xml version="1.0" encoding="utf-8"?>
+<file path=ppt/slides/slide15.xml><?xml version="1.0" encoding="utf-8"?>
 <p:sld xmlns:a="http://schemas.openxmlformats.org/drawingml/2006/main" xmlns:r="http://schemas.openxmlformats.org/officeDocument/2006/relationships" xmlns:p="http://schemas.openxmlformats.org/presentationml/2006/main">
   <p:cSld>
     <p:bg>
@@ -3867,7 +4035,289 @@
 </p:sld>
 </file>
 
-<file path=ppt/slides/slide15.xml><?xml version="1.0" encoding="utf-8"?>
+<file path=ppt/slides/slide16.xml><?xml version="1.0" encoding="utf-8"?>
+<p:sld xmlns:a="http://schemas.openxmlformats.org/drawingml/2006/main" xmlns:r="http://schemas.openxmlformats.org/officeDocument/2006/relationships" xmlns:p="http://schemas.openxmlformats.org/presentationml/2006/main">
+  <p:cSld>
+    <p:bg>
+      <p:bgPr>
+        <a:solidFill>
+          <a:schemeClr val="tx1"/>
+        </a:solidFill>
+        <a:effectLst/>
+      </p:bgPr>
+    </p:bg>
+    <p:spTree>
+      <p:nvGrpSpPr>
+        <p:cNvPr id="1" name="">
+          <a:extLst>
+            <a:ext uri="{FF2B5EF4-FFF2-40B4-BE49-F238E27FC236}">
+              <a16:creationId xmlns:a16="http://schemas.microsoft.com/office/drawing/2014/main" id="{4BF86856-D969-3276-F51A-BDE21F462682}"/>
+            </a:ext>
+          </a:extLst>
+        </p:cNvPr>
+        <p:cNvGrpSpPr/>
+        <p:nvPr/>
+      </p:nvGrpSpPr>
+      <p:grpSpPr>
+        <a:xfrm>
+          <a:off x="0" y="0"/>
+          <a:ext cx="0" cy="0"/>
+          <a:chOff x="0" y="0"/>
+          <a:chExt cx="0" cy="0"/>
+        </a:xfrm>
+      </p:grpSpPr>
+      <p:sp>
+        <p:nvSpPr>
+          <p:cNvPr id="3" name="Subtitle 2">
+            <a:extLst>
+              <a:ext uri="{FF2B5EF4-FFF2-40B4-BE49-F238E27FC236}">
+                <a16:creationId xmlns:a16="http://schemas.microsoft.com/office/drawing/2014/main" id="{BF4E430A-97D2-6E79-55A2-AAB0CEAE43C3}"/>
+              </a:ext>
+            </a:extLst>
+          </p:cNvPr>
+          <p:cNvSpPr>
+            <a:spLocks noGrp="1"/>
+          </p:cNvSpPr>
+          <p:nvPr>
+            <p:ph type="subTitle" idx="1"/>
+          </p:nvPr>
+        </p:nvSpPr>
+        <p:spPr>
+          <a:xfrm>
+            <a:off x="84221" y="213360"/>
+            <a:ext cx="8891337" cy="6416040"/>
+          </a:xfrm>
+        </p:spPr>
+        <p:txBody>
+          <a:bodyPr>
+            <a:noAutofit/>
+          </a:bodyPr>
+          <a:lstStyle/>
+          <a:p>
+            <a:endParaRPr lang="en-US" sz="5400" b="1" dirty="0">
+              <a:solidFill>
+                <a:schemeClr val="bg1"/>
+              </a:solidFill>
+              <a:latin typeface="Avenir Medium" panose="02000503020000020003" pitchFamily="2" charset="0"/>
+              <a:ea typeface="Bodoni Ornaments" pitchFamily="2" charset="0"/>
+            </a:endParaRPr>
+          </a:p>
+          <a:p>
+            <a:r>
+              <a:rPr lang="en-US" sz="5400" b="1" dirty="0" err="1">
+                <a:solidFill>
+                  <a:schemeClr val="bg1"/>
+                </a:solidFill>
+                <a:latin typeface="Avenir Medium" panose="02000503020000020003" pitchFamily="2" charset="0"/>
+                <a:ea typeface="Bodoni Ornaments" pitchFamily="2" charset="0"/>
+              </a:rPr>
+              <a:t>'Cause</a:t>
+            </a:r>
+            <a:r>
+              <a:rPr lang="en-US" sz="5400" b="1" dirty="0">
+                <a:solidFill>
+                  <a:schemeClr val="bg1"/>
+                </a:solidFill>
+                <a:latin typeface="Avenir Medium" panose="02000503020000020003" pitchFamily="2" charset="0"/>
+                <a:ea typeface="Bodoni Ornaments" pitchFamily="2" charset="0"/>
+              </a:rPr>
+              <a:t> when we see You</a:t>
+            </a:r>
+          </a:p>
+          <a:p>
+            <a:r>
+              <a:rPr lang="en-US" sz="5400" b="1" dirty="0">
+                <a:solidFill>
+                  <a:schemeClr val="bg1"/>
+                </a:solidFill>
+                <a:latin typeface="Avenir Medium" panose="02000503020000020003" pitchFamily="2" charset="0"/>
+                <a:ea typeface="Bodoni Ornaments" pitchFamily="2" charset="0"/>
+              </a:rPr>
+              <a:t>We find strength </a:t>
+            </a:r>
+          </a:p>
+          <a:p>
+            <a:r>
+              <a:rPr lang="en-US" sz="5400" b="1" dirty="0">
+                <a:solidFill>
+                  <a:schemeClr val="bg1"/>
+                </a:solidFill>
+                <a:latin typeface="Avenir Medium" panose="02000503020000020003" pitchFamily="2" charset="0"/>
+                <a:ea typeface="Bodoni Ornaments" pitchFamily="2" charset="0"/>
+              </a:rPr>
+              <a:t>to face the day</a:t>
+            </a:r>
+          </a:p>
+          <a:p>
+            <a:endParaRPr lang="en-US" sz="5400" b="1" dirty="0">
+              <a:solidFill>
+                <a:schemeClr val="bg1"/>
+              </a:solidFill>
+              <a:latin typeface="Avenir Medium" panose="02000503020000020003" pitchFamily="2" charset="0"/>
+              <a:ea typeface="Bodoni Ornaments" pitchFamily="2" charset="0"/>
+            </a:endParaRPr>
+          </a:p>
+          <a:p>
+            <a:endParaRPr lang="en-US" sz="5400" b="1" dirty="0">
+              <a:solidFill>
+                <a:schemeClr val="bg1"/>
+              </a:solidFill>
+              <a:latin typeface="Avenir Medium" panose="02000503020000020003" pitchFamily="2" charset="0"/>
+              <a:ea typeface="Bodoni Ornaments" pitchFamily="2" charset="0"/>
+            </a:endParaRPr>
+          </a:p>
+        </p:txBody>
+      </p:sp>
+    </p:spTree>
+    <p:extLst>
+      <p:ext uri="{BB962C8B-B14F-4D97-AF65-F5344CB8AC3E}">
+        <p14:creationId xmlns:p14="http://schemas.microsoft.com/office/powerpoint/2010/main" val="4289721956"/>
+      </p:ext>
+    </p:extLst>
+  </p:cSld>
+  <p:clrMapOvr>
+    <a:masterClrMapping/>
+  </p:clrMapOvr>
+</p:sld>
+</file>
+
+<file path=ppt/slides/slide17.xml><?xml version="1.0" encoding="utf-8"?>
+<p:sld xmlns:a="http://schemas.openxmlformats.org/drawingml/2006/main" xmlns:r="http://schemas.openxmlformats.org/officeDocument/2006/relationships" xmlns:p="http://schemas.openxmlformats.org/presentationml/2006/main">
+  <p:cSld>
+    <p:bg>
+      <p:bgPr>
+        <a:solidFill>
+          <a:schemeClr val="tx1"/>
+        </a:solidFill>
+        <a:effectLst/>
+      </p:bgPr>
+    </p:bg>
+    <p:spTree>
+      <p:nvGrpSpPr>
+        <p:cNvPr id="1" name="">
+          <a:extLst>
+            <a:ext uri="{FF2B5EF4-FFF2-40B4-BE49-F238E27FC236}">
+              <a16:creationId xmlns:a16="http://schemas.microsoft.com/office/drawing/2014/main" id="{0F02847F-47EB-1BCE-C80A-4B1E59530EAE}"/>
+            </a:ext>
+          </a:extLst>
+        </p:cNvPr>
+        <p:cNvGrpSpPr/>
+        <p:nvPr/>
+      </p:nvGrpSpPr>
+      <p:grpSpPr>
+        <a:xfrm>
+          <a:off x="0" y="0"/>
+          <a:ext cx="0" cy="0"/>
+          <a:chOff x="0" y="0"/>
+          <a:chExt cx="0" cy="0"/>
+        </a:xfrm>
+      </p:grpSpPr>
+      <p:sp>
+        <p:nvSpPr>
+          <p:cNvPr id="3" name="Subtitle 2">
+            <a:extLst>
+              <a:ext uri="{FF2B5EF4-FFF2-40B4-BE49-F238E27FC236}">
+                <a16:creationId xmlns:a16="http://schemas.microsoft.com/office/drawing/2014/main" id="{AE731EFD-C994-5F18-BADF-ABC1350B9B99}"/>
+              </a:ext>
+            </a:extLst>
+          </p:cNvPr>
+          <p:cNvSpPr>
+            <a:spLocks noGrp="1"/>
+          </p:cNvSpPr>
+          <p:nvPr>
+            <p:ph type="subTitle" idx="1"/>
+          </p:nvPr>
+        </p:nvSpPr>
+        <p:spPr>
+          <a:xfrm>
+            <a:off x="84221" y="213360"/>
+            <a:ext cx="8891337" cy="6416040"/>
+          </a:xfrm>
+        </p:spPr>
+        <p:txBody>
+          <a:bodyPr>
+            <a:noAutofit/>
+          </a:bodyPr>
+          <a:lstStyle/>
+          <a:p>
+            <a:endParaRPr lang="en-US" sz="5400" b="1" dirty="0">
+              <a:solidFill>
+                <a:schemeClr val="bg1"/>
+              </a:solidFill>
+              <a:latin typeface="Avenir Medium" panose="02000503020000020003" pitchFamily="2" charset="0"/>
+              <a:ea typeface="Bodoni Ornaments" pitchFamily="2" charset="0"/>
+            </a:endParaRPr>
+          </a:p>
+          <a:p>
+            <a:r>
+              <a:rPr lang="en-US" sz="5400" b="1" dirty="0">
+                <a:solidFill>
+                  <a:schemeClr val="bg1"/>
+                </a:solidFill>
+                <a:latin typeface="Avenir Medium" panose="02000503020000020003" pitchFamily="2" charset="0"/>
+                <a:ea typeface="Bodoni Ornaments" pitchFamily="2" charset="0"/>
+              </a:rPr>
+              <a:t>And in Your presence </a:t>
+            </a:r>
+          </a:p>
+          <a:p>
+            <a:r>
+              <a:rPr lang="en-US" sz="5400" b="1" dirty="0">
+                <a:solidFill>
+                  <a:schemeClr val="bg1"/>
+                </a:solidFill>
+                <a:latin typeface="Avenir Medium" panose="02000503020000020003" pitchFamily="2" charset="0"/>
+                <a:ea typeface="Bodoni Ornaments" pitchFamily="2" charset="0"/>
+              </a:rPr>
+              <a:t>All our fears are washed away</a:t>
+            </a:r>
+          </a:p>
+          <a:p>
+            <a:endParaRPr lang="en-US" sz="5400" b="1" dirty="0">
+              <a:solidFill>
+                <a:schemeClr val="bg1"/>
+              </a:solidFill>
+              <a:latin typeface="Avenir Medium" panose="02000503020000020003" pitchFamily="2" charset="0"/>
+              <a:ea typeface="Bodoni Ornaments" pitchFamily="2" charset="0"/>
+            </a:endParaRPr>
+          </a:p>
+          <a:p>
+            <a:r>
+              <a:rPr lang="en-US" sz="5400" b="1" dirty="0">
+                <a:solidFill>
+                  <a:schemeClr val="bg1"/>
+                </a:solidFill>
+                <a:latin typeface="Avenir Medium" panose="02000503020000020003" pitchFamily="2" charset="0"/>
+                <a:ea typeface="Bodoni Ornaments" pitchFamily="2" charset="0"/>
+              </a:rPr>
+              <a:t>washed  away</a:t>
+            </a:r>
+          </a:p>
+          <a:p>
+            <a:endParaRPr lang="en-US" sz="5400" b="1" dirty="0">
+              <a:solidFill>
+                <a:schemeClr val="bg1"/>
+              </a:solidFill>
+              <a:latin typeface="Avenir Medium" panose="02000503020000020003" pitchFamily="2" charset="0"/>
+              <a:ea typeface="Bodoni Ornaments" pitchFamily="2" charset="0"/>
+            </a:endParaRPr>
+          </a:p>
+        </p:txBody>
+      </p:sp>
+    </p:spTree>
+    <p:extLst>
+      <p:ext uri="{BB962C8B-B14F-4D97-AF65-F5344CB8AC3E}">
+        <p14:creationId xmlns:p14="http://schemas.microsoft.com/office/powerpoint/2010/main" val="396316909"/>
+      </p:ext>
+    </p:extLst>
+  </p:cSld>
+  <p:clrMapOvr>
+    <a:masterClrMapping/>
+  </p:clrMapOvr>
+</p:sld>
+</file>
+
+<file path=ppt/slides/slide18.xml><?xml version="1.0" encoding="utf-8"?>
 <p:sld xmlns:a="http://schemas.openxmlformats.org/drawingml/2006/main" xmlns:r="http://schemas.openxmlformats.org/officeDocument/2006/relationships" xmlns:p="http://schemas.openxmlformats.org/presentationml/2006/main">
   <p:cSld>
     <p:bg>
@@ -4006,7 +4456,7 @@
 </p:sld>
 </file>
 
-<file path=ppt/slides/slide16.xml><?xml version="1.0" encoding="utf-8"?>
+<file path=ppt/slides/slide19.xml><?xml version="1.0" encoding="utf-8"?>
 <p:sld xmlns:a="http://schemas.openxmlformats.org/drawingml/2006/main" xmlns:r="http://schemas.openxmlformats.org/officeDocument/2006/relationships" xmlns:p="http://schemas.openxmlformats.org/presentationml/2006/main">
   <p:cSld>
     <p:bg>
@@ -4302,6 +4752,157 @@
 </p:sld>
 </file>
 
+<file path=ppt/slides/slide20.xml><?xml version="1.0" encoding="utf-8"?>
+<p:sld xmlns:a="http://schemas.openxmlformats.org/drawingml/2006/main" xmlns:r="http://schemas.openxmlformats.org/officeDocument/2006/relationships" xmlns:p="http://schemas.openxmlformats.org/presentationml/2006/main">
+  <p:cSld>
+    <p:bg>
+      <p:bgPr>
+        <a:solidFill>
+          <a:schemeClr val="tx1"/>
+        </a:solidFill>
+        <a:effectLst/>
+      </p:bgPr>
+    </p:bg>
+    <p:spTree>
+      <p:nvGrpSpPr>
+        <p:cNvPr id="1" name="">
+          <a:extLst>
+            <a:ext uri="{FF2B5EF4-FFF2-40B4-BE49-F238E27FC236}">
+              <a16:creationId xmlns:a16="http://schemas.microsoft.com/office/drawing/2014/main" id="{94A0BE81-645A-4BA6-5790-96FC73445304}"/>
+            </a:ext>
+          </a:extLst>
+        </p:cNvPr>
+        <p:cNvGrpSpPr/>
+        <p:nvPr/>
+      </p:nvGrpSpPr>
+      <p:grpSpPr>
+        <a:xfrm>
+          <a:off x="0" y="0"/>
+          <a:ext cx="0" cy="0"/>
+          <a:chOff x="0" y="0"/>
+          <a:chExt cx="0" cy="0"/>
+        </a:xfrm>
+      </p:grpSpPr>
+      <p:sp>
+        <p:nvSpPr>
+          <p:cNvPr id="3" name="Subtitle 2">
+            <a:extLst>
+              <a:ext uri="{FF2B5EF4-FFF2-40B4-BE49-F238E27FC236}">
+                <a16:creationId xmlns:a16="http://schemas.microsoft.com/office/drawing/2014/main" id="{A580D504-616D-D4A9-A56C-57F3706A316F}"/>
+              </a:ext>
+            </a:extLst>
+          </p:cNvPr>
+          <p:cNvSpPr>
+            <a:spLocks noGrp="1"/>
+          </p:cNvSpPr>
+          <p:nvPr>
+            <p:ph type="subTitle" idx="1"/>
+          </p:nvPr>
+        </p:nvSpPr>
+        <p:spPr>
+          <a:xfrm>
+            <a:off x="144379" y="228600"/>
+            <a:ext cx="8903369" cy="6431280"/>
+          </a:xfrm>
+        </p:spPr>
+        <p:txBody>
+          <a:bodyPr>
+            <a:noAutofit/>
+          </a:bodyPr>
+          <a:lstStyle/>
+          <a:p>
+            <a:endParaRPr lang="en-US" sz="5400" b="1" dirty="0">
+              <a:solidFill>
+                <a:schemeClr val="bg1"/>
+              </a:solidFill>
+              <a:latin typeface="Avenir Medium" panose="02000503020000020003" pitchFamily="2" charset="0"/>
+              <a:ea typeface="Bodoni Ornaments" pitchFamily="2" charset="0"/>
+            </a:endParaRPr>
+          </a:p>
+          <a:p>
+            <a:r>
+              <a:rPr lang="en-US" sz="5400" b="1" dirty="0">
+                <a:solidFill>
+                  <a:schemeClr val="bg1"/>
+                </a:solidFill>
+                <a:latin typeface="Avenir Medium" panose="02000503020000020003" pitchFamily="2" charset="0"/>
+                <a:ea typeface="Bodoni Ornaments" pitchFamily="2" charset="0"/>
+              </a:rPr>
+              <a:t>Hosanna, hosanna </a:t>
+            </a:r>
+          </a:p>
+          <a:p>
+            <a:r>
+              <a:rPr lang="en-US" sz="5400" b="1" dirty="0">
+                <a:solidFill>
+                  <a:schemeClr val="bg1"/>
+                </a:solidFill>
+                <a:latin typeface="Avenir Medium" panose="02000503020000020003" pitchFamily="2" charset="0"/>
+                <a:ea typeface="Bodoni Ornaments" pitchFamily="2" charset="0"/>
+              </a:rPr>
+              <a:t>Come have Your way </a:t>
+            </a:r>
+          </a:p>
+          <a:p>
+            <a:r>
+              <a:rPr lang="en-US" sz="5400" b="1" dirty="0">
+                <a:solidFill>
+                  <a:schemeClr val="bg1"/>
+                </a:solidFill>
+                <a:latin typeface="Avenir Medium" panose="02000503020000020003" pitchFamily="2" charset="0"/>
+                <a:ea typeface="Bodoni Ornaments" pitchFamily="2" charset="0"/>
+              </a:rPr>
+              <a:t>among us</a:t>
+            </a:r>
+          </a:p>
+          <a:p>
+            <a:r>
+              <a:rPr lang="en-US" sz="5400" b="1" dirty="0">
+                <a:solidFill>
+                  <a:schemeClr val="bg1"/>
+                </a:solidFill>
+                <a:latin typeface="Avenir Medium" panose="02000503020000020003" pitchFamily="2" charset="0"/>
+                <a:ea typeface="Bodoni Ornaments" pitchFamily="2" charset="0"/>
+              </a:rPr>
+              <a:t>We welcome You here </a:t>
+            </a:r>
+          </a:p>
+          <a:p>
+            <a:r>
+              <a:rPr lang="en-US" sz="5400" b="1" dirty="0">
+                <a:solidFill>
+                  <a:schemeClr val="bg1"/>
+                </a:solidFill>
+                <a:latin typeface="Avenir Medium" panose="02000503020000020003" pitchFamily="2" charset="0"/>
+                <a:ea typeface="Bodoni Ornaments" pitchFamily="2" charset="0"/>
+              </a:rPr>
+              <a:t>Lord Jesus</a:t>
+            </a:r>
+          </a:p>
+          <a:p>
+            <a:endParaRPr lang="en-US" sz="5400" b="1" dirty="0">
+              <a:solidFill>
+                <a:schemeClr val="bg1"/>
+              </a:solidFill>
+              <a:latin typeface="Avenir Medium" panose="02000503020000020003" pitchFamily="2" charset="0"/>
+              <a:ea typeface="Bodoni Ornaments" pitchFamily="2" charset="0"/>
+            </a:endParaRPr>
+          </a:p>
+        </p:txBody>
+      </p:sp>
+    </p:spTree>
+    <p:extLst>
+      <p:ext uri="{BB962C8B-B14F-4D97-AF65-F5344CB8AC3E}">
+        <p14:creationId xmlns:p14="http://schemas.microsoft.com/office/powerpoint/2010/main" val="2937986624"/>
+      </p:ext>
+    </p:extLst>
+  </p:cSld>
+  <p:clrMapOvr>
+    <a:masterClrMapping/>
+  </p:clrMapOvr>
+</p:sld>
+</file>
+
 <file path=ppt/slides/slide3.xml><?xml version="1.0" encoding="utf-8"?>
 <p:sld xmlns:a="http://schemas.openxmlformats.org/drawingml/2006/main" xmlns:r="http://schemas.openxmlformats.org/officeDocument/2006/relationships" xmlns:p="http://schemas.openxmlformats.org/presentationml/2006/main">
   <p:cSld>
@@ -4824,6 +5425,15 @@
             </a:r>
           </a:p>
           <a:p>
+            <a:endParaRPr lang="en-US" sz="5400" b="1" dirty="0">
+              <a:solidFill>
+                <a:schemeClr val="bg1"/>
+              </a:solidFill>
+              <a:latin typeface="Avenir Medium" panose="02000503020000020003" pitchFamily="2" charset="0"/>
+              <a:ea typeface="Bodoni Ornaments" pitchFamily="2" charset="0"/>
+            </a:endParaRPr>
+          </a:p>
+          <a:p>
             <a:r>
               <a:rPr lang="en-US" sz="5400" b="1" dirty="0">
                 <a:solidFill>
@@ -4872,6 +5482,154 @@
 </file>
 
 <file path=ppt/slides/slide7.xml><?xml version="1.0" encoding="utf-8"?>
+<p:sld xmlns:a="http://schemas.openxmlformats.org/drawingml/2006/main" xmlns:r="http://schemas.openxmlformats.org/officeDocument/2006/relationships" xmlns:p="http://schemas.openxmlformats.org/presentationml/2006/main">
+  <p:cSld>
+    <p:bg>
+      <p:bgPr>
+        <a:solidFill>
+          <a:schemeClr val="tx1"/>
+        </a:solidFill>
+        <a:effectLst/>
+      </p:bgPr>
+    </p:bg>
+    <p:spTree>
+      <p:nvGrpSpPr>
+        <p:cNvPr id="1" name="">
+          <a:extLst>
+            <a:ext uri="{FF2B5EF4-FFF2-40B4-BE49-F238E27FC236}">
+              <a16:creationId xmlns:a16="http://schemas.microsoft.com/office/drawing/2014/main" id="{FAB60A57-05C0-13A6-0948-45323D32D40B}"/>
+            </a:ext>
+          </a:extLst>
+        </p:cNvPr>
+        <p:cNvGrpSpPr/>
+        <p:nvPr/>
+      </p:nvGrpSpPr>
+      <p:grpSpPr>
+        <a:xfrm>
+          <a:off x="0" y="0"/>
+          <a:ext cx="0" cy="0"/>
+          <a:chOff x="0" y="0"/>
+          <a:chExt cx="0" cy="0"/>
+        </a:xfrm>
+      </p:grpSpPr>
+      <p:sp>
+        <p:nvSpPr>
+          <p:cNvPr id="3" name="Subtitle 2">
+            <a:extLst>
+              <a:ext uri="{FF2B5EF4-FFF2-40B4-BE49-F238E27FC236}">
+                <a16:creationId xmlns:a16="http://schemas.microsoft.com/office/drawing/2014/main" id="{D2694E79-5B4C-CFC3-27E7-F19C45D6DEFE}"/>
+              </a:ext>
+            </a:extLst>
+          </p:cNvPr>
+          <p:cNvSpPr>
+            <a:spLocks noGrp="1"/>
+          </p:cNvSpPr>
+          <p:nvPr>
+            <p:ph type="subTitle" idx="1"/>
+          </p:nvPr>
+        </p:nvSpPr>
+        <p:spPr>
+          <a:xfrm>
+            <a:off x="144379" y="228600"/>
+            <a:ext cx="8903369" cy="6431280"/>
+          </a:xfrm>
+        </p:spPr>
+        <p:txBody>
+          <a:bodyPr>
+            <a:noAutofit/>
+          </a:bodyPr>
+          <a:lstStyle/>
+          <a:p>
+            <a:endParaRPr lang="en-US" sz="5400" b="1" dirty="0">
+              <a:solidFill>
+                <a:schemeClr val="bg1"/>
+              </a:solidFill>
+              <a:latin typeface="Avenir Medium" panose="02000503020000020003" pitchFamily="2" charset="0"/>
+              <a:ea typeface="Bodoni Ornaments" pitchFamily="2" charset="0"/>
+            </a:endParaRPr>
+          </a:p>
+          <a:p>
+            <a:r>
+              <a:rPr lang="en-US" sz="5400" b="1" dirty="0">
+                <a:solidFill>
+                  <a:schemeClr val="bg1"/>
+                </a:solidFill>
+                <a:latin typeface="Avenir Medium" panose="02000503020000020003" pitchFamily="2" charset="0"/>
+                <a:ea typeface="Bodoni Ornaments" pitchFamily="2" charset="0"/>
+              </a:rPr>
+              <a:t>Hosanna, hosanna </a:t>
+            </a:r>
+          </a:p>
+          <a:p>
+            <a:r>
+              <a:rPr lang="en-US" sz="5400" b="1" dirty="0">
+                <a:solidFill>
+                  <a:schemeClr val="bg1"/>
+                </a:solidFill>
+                <a:latin typeface="Avenir Medium" panose="02000503020000020003" pitchFamily="2" charset="0"/>
+                <a:ea typeface="Bodoni Ornaments" pitchFamily="2" charset="0"/>
+              </a:rPr>
+              <a:t>You are the God </a:t>
+            </a:r>
+          </a:p>
+          <a:p>
+            <a:endParaRPr lang="en-US" sz="5400" b="1" dirty="0">
+              <a:solidFill>
+                <a:schemeClr val="bg1"/>
+              </a:solidFill>
+              <a:latin typeface="Avenir Medium" panose="02000503020000020003" pitchFamily="2" charset="0"/>
+              <a:ea typeface="Bodoni Ornaments" pitchFamily="2" charset="0"/>
+            </a:endParaRPr>
+          </a:p>
+          <a:p>
+            <a:r>
+              <a:rPr lang="en-US" sz="5400" b="1" dirty="0">
+                <a:solidFill>
+                  <a:schemeClr val="bg1"/>
+                </a:solidFill>
+                <a:latin typeface="Avenir Medium" panose="02000503020000020003" pitchFamily="2" charset="0"/>
+                <a:ea typeface="Bodoni Ornaments" pitchFamily="2" charset="0"/>
+              </a:rPr>
+              <a:t>who saves us, </a:t>
+            </a:r>
+          </a:p>
+          <a:p>
+            <a:r>
+              <a:rPr lang="en-US" sz="5400" b="1" dirty="0">
+                <a:solidFill>
+                  <a:schemeClr val="bg1"/>
+                </a:solidFill>
+                <a:latin typeface="Avenir Medium" panose="02000503020000020003" pitchFamily="2" charset="0"/>
+                <a:ea typeface="Bodoni Ornaments" pitchFamily="2" charset="0"/>
+              </a:rPr>
+              <a:t>worthy of all our praises</a:t>
+            </a:r>
+          </a:p>
+          <a:p>
+            <a:endParaRPr lang="en-US" sz="5400" b="1" dirty="0">
+              <a:solidFill>
+                <a:schemeClr val="bg1"/>
+              </a:solidFill>
+              <a:latin typeface="Avenir Medium" panose="02000503020000020003" pitchFamily="2" charset="0"/>
+              <a:ea typeface="Bodoni Ornaments" pitchFamily="2" charset="0"/>
+            </a:endParaRPr>
+          </a:p>
+        </p:txBody>
+      </p:sp>
+    </p:spTree>
+    <p:extLst>
+      <p:ext uri="{BB962C8B-B14F-4D97-AF65-F5344CB8AC3E}">
+        <p14:creationId xmlns:p14="http://schemas.microsoft.com/office/powerpoint/2010/main" val="3829067210"/>
+      </p:ext>
+    </p:extLst>
+  </p:cSld>
+  <p:clrMapOvr>
+    <a:masterClrMapping/>
+  </p:clrMapOvr>
+</p:sld>
+</file>
+
+<file path=ppt/slides/slide8.xml><?xml version="1.0" encoding="utf-8"?>
 <p:sld xmlns:a="http://schemas.openxmlformats.org/drawingml/2006/main" xmlns:r="http://schemas.openxmlformats.org/officeDocument/2006/relationships" xmlns:p="http://schemas.openxmlformats.org/presentationml/2006/main">
   <p:cSld>
     <p:bg>
@@ -5004,7 +5762,7 @@
 </p:sld>
 </file>
 
-<file path=ppt/slides/slide8.xml><?xml version="1.0" encoding="utf-8"?>
+<file path=ppt/slides/slide9.xml><?xml version="1.0" encoding="utf-8"?>
 <p:sld xmlns:a="http://schemas.openxmlformats.org/drawingml/2006/main" xmlns:r="http://schemas.openxmlformats.org/officeDocument/2006/relationships" xmlns:p="http://schemas.openxmlformats.org/presentationml/2006/main">
   <p:cSld>
     <p:bg>
@@ -5131,152 +5889,6 @@
     <p:extLst>
       <p:ext uri="{BB962C8B-B14F-4D97-AF65-F5344CB8AC3E}">
         <p14:creationId xmlns:p14="http://schemas.microsoft.com/office/powerpoint/2010/main" val="3933498333"/>
-      </p:ext>
-    </p:extLst>
-  </p:cSld>
-  <p:clrMapOvr>
-    <a:masterClrMapping/>
-  </p:clrMapOvr>
-</p:sld>
-</file>
-
-<file path=ppt/slides/slide9.xml><?xml version="1.0" encoding="utf-8"?>
-<p:sld xmlns:a="http://schemas.openxmlformats.org/drawingml/2006/main" xmlns:r="http://schemas.openxmlformats.org/officeDocument/2006/relationships" xmlns:p="http://schemas.openxmlformats.org/presentationml/2006/main">
-  <p:cSld>
-    <p:bg>
-      <p:bgPr>
-        <a:solidFill>
-          <a:schemeClr val="tx1"/>
-        </a:solidFill>
-        <a:effectLst/>
-      </p:bgPr>
-    </p:bg>
-    <p:spTree>
-      <p:nvGrpSpPr>
-        <p:cNvPr id="1" name="">
-          <a:extLst>
-            <a:ext uri="{FF2B5EF4-FFF2-40B4-BE49-F238E27FC236}">
-              <a16:creationId xmlns:a16="http://schemas.microsoft.com/office/drawing/2014/main" id="{1ACE3B7E-6A4C-4B3D-3B04-373AC3904386}"/>
-            </a:ext>
-          </a:extLst>
-        </p:cNvPr>
-        <p:cNvGrpSpPr/>
-        <p:nvPr/>
-      </p:nvGrpSpPr>
-      <p:grpSpPr>
-        <a:xfrm>
-          <a:off x="0" y="0"/>
-          <a:ext cx="0" cy="0"/>
-          <a:chOff x="0" y="0"/>
-          <a:chExt cx="0" cy="0"/>
-        </a:xfrm>
-      </p:grpSpPr>
-      <p:sp>
-        <p:nvSpPr>
-          <p:cNvPr id="3" name="Subtitle 2">
-            <a:extLst>
-              <a:ext uri="{FF2B5EF4-FFF2-40B4-BE49-F238E27FC236}">
-                <a16:creationId xmlns:a16="http://schemas.microsoft.com/office/drawing/2014/main" id="{7070656A-99E5-DC2B-B1AA-76D635E1E90F}"/>
-              </a:ext>
-            </a:extLst>
-          </p:cNvPr>
-          <p:cNvSpPr>
-            <a:spLocks noGrp="1"/>
-          </p:cNvSpPr>
-          <p:nvPr>
-            <p:ph type="subTitle" idx="1"/>
-          </p:nvPr>
-        </p:nvSpPr>
-        <p:spPr>
-          <a:xfrm>
-            <a:off x="84221" y="213360"/>
-            <a:ext cx="8891337" cy="6416040"/>
-          </a:xfrm>
-        </p:spPr>
-        <p:txBody>
-          <a:bodyPr>
-            <a:noAutofit/>
-          </a:bodyPr>
-          <a:lstStyle/>
-          <a:p>
-            <a:endParaRPr lang="en-US" sz="5400" b="1" dirty="0">
-              <a:solidFill>
-                <a:schemeClr val="bg1"/>
-              </a:solidFill>
-              <a:latin typeface="Avenir Medium" panose="02000503020000020003" pitchFamily="2" charset="0"/>
-              <a:ea typeface="Bodoni Ornaments" pitchFamily="2" charset="0"/>
-            </a:endParaRPr>
-          </a:p>
-          <a:p>
-            <a:r>
-              <a:rPr lang="en-US" sz="5400" b="1" dirty="0" err="1">
-                <a:solidFill>
-                  <a:schemeClr val="bg1"/>
-                </a:solidFill>
-                <a:latin typeface="Avenir Medium" panose="02000503020000020003" pitchFamily="2" charset="0"/>
-                <a:ea typeface="Bodoni Ornaments" pitchFamily="2" charset="0"/>
-              </a:rPr>
-              <a:t>'Cause</a:t>
-            </a:r>
-            <a:r>
-              <a:rPr lang="en-US" sz="5400" b="1" dirty="0">
-                <a:solidFill>
-                  <a:schemeClr val="bg1"/>
-                </a:solidFill>
-                <a:latin typeface="Avenir Medium" panose="02000503020000020003" pitchFamily="2" charset="0"/>
-                <a:ea typeface="Bodoni Ornaments" pitchFamily="2" charset="0"/>
-              </a:rPr>
-              <a:t> when we see You</a:t>
-            </a:r>
-          </a:p>
-          <a:p>
-            <a:r>
-              <a:rPr lang="en-US" sz="5400" b="1" dirty="0">
-                <a:solidFill>
-                  <a:schemeClr val="bg1"/>
-                </a:solidFill>
-                <a:latin typeface="Avenir Medium" panose="02000503020000020003" pitchFamily="2" charset="0"/>
-                <a:ea typeface="Bodoni Ornaments" pitchFamily="2" charset="0"/>
-              </a:rPr>
-              <a:t>We find strength </a:t>
-            </a:r>
-          </a:p>
-          <a:p>
-            <a:r>
-              <a:rPr lang="en-US" sz="5400" b="1" dirty="0">
-                <a:solidFill>
-                  <a:schemeClr val="bg1"/>
-                </a:solidFill>
-                <a:latin typeface="Avenir Medium" panose="02000503020000020003" pitchFamily="2" charset="0"/>
-                <a:ea typeface="Bodoni Ornaments" pitchFamily="2" charset="0"/>
-              </a:rPr>
-              <a:t>to face the day</a:t>
-            </a:r>
-          </a:p>
-          <a:p>
-            <a:endParaRPr lang="en-US" sz="5400" b="1" dirty="0">
-              <a:solidFill>
-                <a:schemeClr val="bg1"/>
-              </a:solidFill>
-              <a:latin typeface="Avenir Medium" panose="02000503020000020003" pitchFamily="2" charset="0"/>
-              <a:ea typeface="Bodoni Ornaments" pitchFamily="2" charset="0"/>
-            </a:endParaRPr>
-          </a:p>
-          <a:p>
-            <a:endParaRPr lang="en-US" sz="5400" b="1" dirty="0">
-              <a:solidFill>
-                <a:schemeClr val="bg1"/>
-              </a:solidFill>
-              <a:latin typeface="Avenir Medium" panose="02000503020000020003" pitchFamily="2" charset="0"/>
-              <a:ea typeface="Bodoni Ornaments" pitchFamily="2" charset="0"/>
-            </a:endParaRPr>
-          </a:p>
-        </p:txBody>
-      </p:sp>
-    </p:spTree>
-    <p:extLst>
-      <p:ext uri="{BB962C8B-B14F-4D97-AF65-F5344CB8AC3E}">
-        <p14:creationId xmlns:p14="http://schemas.microsoft.com/office/powerpoint/2010/main" val="2309639426"/>
       </p:ext>
     </p:extLst>
   </p:cSld>
